--- a/markdown/files/slides/lecture25_complexity.pptx
+++ b/markdown/files/slides/lecture25_complexity.pptx
@@ -3749,8 +3749,12 @@
               <a:rPr lang="en-US" dirty="0"/>
             </a:br>
             <a:r>
+              <a:rPr lang="en-US"/>
+              <a:t>Lecture 25: </a:t>
+            </a:r>
+            <a:r>
               <a:rPr lang="en-US" dirty="0"/>
-              <a:t>Lecture 24: Complexity and Tractability</a:t>
+              <a:t>Complexity and Tractability</a:t>
             </a:r>
           </a:p>
         </p:txBody>

--- a/markdown/files/slides/lecture25_complexity.pptx
+++ b/markdown/files/slides/lecture25_complexity.pptx
@@ -3743,18 +3743,18 @@
             </a:r>
             <a:r>
               <a:rPr lang="en-US"/>
-              <a:t>332 Winter 2026</a:t>
+              <a:t>332 Spring </a:t>
+            </a:r>
+            <a:r>
+              <a:rPr lang="en-US" dirty="0"/>
+              <a:t>2026</a:t>
             </a:r>
             <a:br>
               <a:rPr lang="en-US" dirty="0"/>
             </a:br>
             <a:r>
-              <a:rPr lang="en-US"/>
-              <a:t>Lecture 25: </a:t>
-            </a:r>
-            <a:r>
               <a:rPr lang="en-US" dirty="0"/>
-              <a:t>Complexity and Tractability</a:t>
+              <a:t>Lecture 25: Complexity and Tractability</a:t>
             </a:r>
           </a:p>
         </p:txBody>
